--- a/01.数学基礎/01.数学基礎.pptx
+++ b/01.数学基礎/01.数学基礎.pptx
@@ -17165,8 +17165,8 @@
           </a:p>
         </p:txBody>
       </p:sp>
-      <mc:AlternateContent xmlns:mc="http://schemas.openxmlformats.org/markup-compatibility/2006">
-        <mc:Choice xmlns:a14="http://schemas.microsoft.com/office/drawing/2010/main" Requires="a14">
+      <mc:AlternateContent xmlns:mc="http://schemas.openxmlformats.org/markup-compatibility/2006" xmlns:a14="http://schemas.microsoft.com/office/drawing/2010/main">
+        <mc:Choice Requires="a14">
           <p:sp>
             <p:nvSpPr>
               <p:cNvPr id="4" name="テキスト ボックス 3">
@@ -17195,6 +17195,7 @@
               </a:bodyPr>
               <a:lstStyle/>
               <a:p>
+                <a:pPr/>
                 <a14:m>
                   <m:oMathPara xmlns:m="http://schemas.openxmlformats.org/officeDocument/2006/math">
                     <m:oMathParaPr>
@@ -17325,7 +17326,7 @@
             </p:txBody>
           </p:sp>
         </mc:Choice>
-        <mc:Fallback>
+        <mc:Fallback xmlns="">
           <p:sp>
             <p:nvSpPr>
               <p:cNvPr id="4" name="テキスト ボックス 3">
@@ -18681,7 +18682,7 @@
         </p:nvSpPr>
         <p:spPr>
           <a:xfrm>
-            <a:off x="571500" y="571500"/>
+            <a:off x="577168" y="487526"/>
             <a:ext cx="95250" cy="685800"/>
           </a:xfrm>
           <a:prstGeom prst="rect">
@@ -19554,13 +19555,19 @@
       </p:sp>
       <p:sp>
         <p:nvSpPr>
-          <p:cNvPr id="181" name="Google Shape;181;p17"/>
+          <p:cNvPr id="6" name="Google Shape;207;p21">
+            <a:extLst>
+              <a:ext uri="{FF2B5EF4-FFF2-40B4-BE49-F238E27FC236}">
+                <a16:creationId xmlns:a16="http://schemas.microsoft.com/office/drawing/2014/main" id="{960019B4-918D-4513-B963-A20D3D6FC50A}"/>
+              </a:ext>
+            </a:extLst>
+          </p:cNvPr>
           <p:cNvSpPr/>
           <p:nvPr/>
         </p:nvSpPr>
         <p:spPr>
           <a:xfrm>
-            <a:off x="571500" y="458689"/>
+            <a:off x="577168" y="487526"/>
             <a:ext cx="95250" cy="685800"/>
           </a:xfrm>
           <a:prstGeom prst="rect">
@@ -19600,6 +19607,896 @@
           </a:p>
         </p:txBody>
       </p:sp>
+      <p:sp>
+        <p:nvSpPr>
+          <p:cNvPr id="27" name="Google Shape;85;p13">
+            <a:extLst>
+              <a:ext uri="{FF2B5EF4-FFF2-40B4-BE49-F238E27FC236}">
+                <a16:creationId xmlns:a16="http://schemas.microsoft.com/office/drawing/2014/main" id="{63A8F6B8-67B3-4A26-897D-9F52F52570DC}"/>
+              </a:ext>
+            </a:extLst>
+          </p:cNvPr>
+          <p:cNvSpPr txBox="1"/>
+          <p:nvPr/>
+        </p:nvSpPr>
+        <p:spPr>
+          <a:xfrm>
+            <a:off x="790575" y="1753191"/>
+            <a:ext cx="476250" cy="323850"/>
+          </a:xfrm>
+          <a:prstGeom prst="rect">
+            <a:avLst/>
+          </a:prstGeom>
+          <a:noFill/>
+          <a:ln>
+            <a:noFill/>
+          </a:ln>
+        </p:spPr>
+        <p:txBody>
+          <a:bodyPr spcFirstLastPara="1" wrap="square" lIns="0" tIns="0" rIns="0" bIns="0" anchor="t" anchorCtr="0">
+            <a:spAutoFit/>
+          </a:bodyPr>
+          <a:lstStyle/>
+          <a:p>
+            <a:pPr marL="0" marR="0" lvl="0" indent="0" algn="l" rtl="0">
+              <a:spcBef>
+                <a:spcPts val="0"/>
+              </a:spcBef>
+              <a:spcAft>
+                <a:spcPts val="0"/>
+              </a:spcAft>
+              <a:buNone/>
+            </a:pPr>
+            <a:r>
+              <a:rPr lang="en-US" sz="2100" b="1" i="0" u="none" strike="noStrike" cap="none">
+                <a:solidFill>
+                  <a:srgbClr val="3B82F6"/>
+                </a:solidFill>
+                <a:latin typeface="Inter"/>
+                <a:ea typeface="Inter"/>
+                <a:cs typeface="Inter"/>
+                <a:sym typeface="Inter"/>
+              </a:rPr>
+              <a:t>1</a:t>
+            </a:r>
+            <a:endParaRPr/>
+          </a:p>
+        </p:txBody>
+      </p:sp>
+      <p:sp>
+        <p:nvSpPr>
+          <p:cNvPr id="28" name="Google Shape;86;p13">
+            <a:extLst>
+              <a:ext uri="{FF2B5EF4-FFF2-40B4-BE49-F238E27FC236}">
+                <a16:creationId xmlns:a16="http://schemas.microsoft.com/office/drawing/2014/main" id="{E34A10B3-2B4D-42D6-8467-61F7AEE92D14}"/>
+              </a:ext>
+            </a:extLst>
+          </p:cNvPr>
+          <p:cNvSpPr txBox="1"/>
+          <p:nvPr/>
+        </p:nvSpPr>
+        <p:spPr>
+          <a:xfrm>
+            <a:off x="6696075" y="1753191"/>
+            <a:ext cx="476250" cy="323850"/>
+          </a:xfrm>
+          <a:prstGeom prst="rect">
+            <a:avLst/>
+          </a:prstGeom>
+          <a:noFill/>
+          <a:ln>
+            <a:noFill/>
+          </a:ln>
+        </p:spPr>
+        <p:txBody>
+          <a:bodyPr spcFirstLastPara="1" wrap="square" lIns="0" tIns="0" rIns="0" bIns="0" anchor="t" anchorCtr="0">
+            <a:spAutoFit/>
+          </a:bodyPr>
+          <a:lstStyle/>
+          <a:p>
+            <a:pPr marL="0" marR="0" lvl="0" indent="0" algn="l" rtl="0">
+              <a:spcBef>
+                <a:spcPts val="0"/>
+              </a:spcBef>
+              <a:spcAft>
+                <a:spcPts val="0"/>
+              </a:spcAft>
+              <a:buNone/>
+            </a:pPr>
+            <a:r>
+              <a:rPr lang="en-US" sz="2100" b="1" i="0" u="none" strike="noStrike" cap="none">
+                <a:solidFill>
+                  <a:srgbClr val="3B82F6"/>
+                </a:solidFill>
+                <a:latin typeface="Inter"/>
+                <a:ea typeface="Inter"/>
+                <a:cs typeface="Inter"/>
+                <a:sym typeface="Inter"/>
+              </a:rPr>
+              <a:t>6</a:t>
+            </a:r>
+            <a:endParaRPr/>
+          </a:p>
+        </p:txBody>
+      </p:sp>
+      <p:sp>
+        <p:nvSpPr>
+          <p:cNvPr id="29" name="Google Shape;87;p13">
+            <a:extLst>
+              <a:ext uri="{FF2B5EF4-FFF2-40B4-BE49-F238E27FC236}">
+                <a16:creationId xmlns:a16="http://schemas.microsoft.com/office/drawing/2014/main" id="{6FD2A61C-BA05-43EA-986C-DAA5A211296E}"/>
+              </a:ext>
+            </a:extLst>
+          </p:cNvPr>
+          <p:cNvSpPr txBox="1"/>
+          <p:nvPr/>
+        </p:nvSpPr>
+        <p:spPr>
+          <a:xfrm>
+            <a:off x="790575" y="2640504"/>
+            <a:ext cx="476250" cy="323850"/>
+          </a:xfrm>
+          <a:prstGeom prst="rect">
+            <a:avLst/>
+          </a:prstGeom>
+          <a:noFill/>
+          <a:ln>
+            <a:noFill/>
+          </a:ln>
+        </p:spPr>
+        <p:txBody>
+          <a:bodyPr spcFirstLastPara="1" wrap="square" lIns="0" tIns="0" rIns="0" bIns="0" anchor="t" anchorCtr="0">
+            <a:spAutoFit/>
+          </a:bodyPr>
+          <a:lstStyle/>
+          <a:p>
+            <a:pPr marL="0" marR="0" lvl="0" indent="0" algn="l" rtl="0">
+              <a:spcBef>
+                <a:spcPts val="0"/>
+              </a:spcBef>
+              <a:spcAft>
+                <a:spcPts val="0"/>
+              </a:spcAft>
+              <a:buNone/>
+            </a:pPr>
+            <a:r>
+              <a:rPr lang="en-US" sz="2100" b="1" i="0" u="none" strike="noStrike" cap="none">
+                <a:solidFill>
+                  <a:srgbClr val="3B82F6"/>
+                </a:solidFill>
+                <a:latin typeface="Inter"/>
+                <a:ea typeface="Inter"/>
+                <a:cs typeface="Inter"/>
+                <a:sym typeface="Inter"/>
+              </a:rPr>
+              <a:t>2</a:t>
+            </a:r>
+            <a:endParaRPr/>
+          </a:p>
+        </p:txBody>
+      </p:sp>
+      <p:sp>
+        <p:nvSpPr>
+          <p:cNvPr id="30" name="Google Shape;88;p13">
+            <a:extLst>
+              <a:ext uri="{FF2B5EF4-FFF2-40B4-BE49-F238E27FC236}">
+                <a16:creationId xmlns:a16="http://schemas.microsoft.com/office/drawing/2014/main" id="{C4A8CE1C-3F3E-40A6-A8B3-74BCCDBDF881}"/>
+              </a:ext>
+            </a:extLst>
+          </p:cNvPr>
+          <p:cNvSpPr txBox="1"/>
+          <p:nvPr/>
+        </p:nvSpPr>
+        <p:spPr>
+          <a:xfrm>
+            <a:off x="6696075" y="2640504"/>
+            <a:ext cx="476250" cy="323850"/>
+          </a:xfrm>
+          <a:prstGeom prst="rect">
+            <a:avLst/>
+          </a:prstGeom>
+          <a:noFill/>
+          <a:ln>
+            <a:noFill/>
+          </a:ln>
+        </p:spPr>
+        <p:txBody>
+          <a:bodyPr spcFirstLastPara="1" wrap="square" lIns="0" tIns="0" rIns="0" bIns="0" anchor="t" anchorCtr="0">
+            <a:spAutoFit/>
+          </a:bodyPr>
+          <a:lstStyle/>
+          <a:p>
+            <a:pPr marL="0" marR="0" lvl="0" indent="0" algn="l" rtl="0">
+              <a:spcBef>
+                <a:spcPts val="0"/>
+              </a:spcBef>
+              <a:spcAft>
+                <a:spcPts val="0"/>
+              </a:spcAft>
+              <a:buNone/>
+            </a:pPr>
+            <a:r>
+              <a:rPr lang="en-US" sz="2100" b="1" i="0" u="none" strike="noStrike" cap="none">
+                <a:solidFill>
+                  <a:srgbClr val="3B82F6"/>
+                </a:solidFill>
+                <a:latin typeface="Inter"/>
+                <a:ea typeface="Inter"/>
+                <a:cs typeface="Inter"/>
+                <a:sym typeface="Inter"/>
+              </a:rPr>
+              <a:t>7</a:t>
+            </a:r>
+            <a:endParaRPr/>
+          </a:p>
+        </p:txBody>
+      </p:sp>
+      <p:sp>
+        <p:nvSpPr>
+          <p:cNvPr id="31" name="Google Shape;89;p13">
+            <a:extLst>
+              <a:ext uri="{FF2B5EF4-FFF2-40B4-BE49-F238E27FC236}">
+                <a16:creationId xmlns:a16="http://schemas.microsoft.com/office/drawing/2014/main" id="{ECD47819-8A00-48CD-8158-F4B9BA5D1113}"/>
+              </a:ext>
+            </a:extLst>
+          </p:cNvPr>
+          <p:cNvSpPr txBox="1"/>
+          <p:nvPr/>
+        </p:nvSpPr>
+        <p:spPr>
+          <a:xfrm>
+            <a:off x="790575" y="3527818"/>
+            <a:ext cx="476250" cy="323850"/>
+          </a:xfrm>
+          <a:prstGeom prst="rect">
+            <a:avLst/>
+          </a:prstGeom>
+          <a:noFill/>
+          <a:ln>
+            <a:noFill/>
+          </a:ln>
+        </p:spPr>
+        <p:txBody>
+          <a:bodyPr spcFirstLastPara="1" wrap="square" lIns="0" tIns="0" rIns="0" bIns="0" anchor="t" anchorCtr="0">
+            <a:spAutoFit/>
+          </a:bodyPr>
+          <a:lstStyle/>
+          <a:p>
+            <a:pPr marL="0" marR="0" lvl="0" indent="0" algn="l" rtl="0">
+              <a:spcBef>
+                <a:spcPts val="0"/>
+              </a:spcBef>
+              <a:spcAft>
+                <a:spcPts val="0"/>
+              </a:spcAft>
+              <a:buNone/>
+            </a:pPr>
+            <a:r>
+              <a:rPr lang="en-US" sz="2100" b="1" i="0" u="none" strike="noStrike" cap="none">
+                <a:solidFill>
+                  <a:srgbClr val="3B82F6"/>
+                </a:solidFill>
+                <a:latin typeface="Inter"/>
+                <a:ea typeface="Inter"/>
+                <a:cs typeface="Inter"/>
+                <a:sym typeface="Inter"/>
+              </a:rPr>
+              <a:t>3</a:t>
+            </a:r>
+            <a:endParaRPr/>
+          </a:p>
+        </p:txBody>
+      </p:sp>
+      <p:sp>
+        <p:nvSpPr>
+          <p:cNvPr id="32" name="Google Shape;90;p13">
+            <a:extLst>
+              <a:ext uri="{FF2B5EF4-FFF2-40B4-BE49-F238E27FC236}">
+                <a16:creationId xmlns:a16="http://schemas.microsoft.com/office/drawing/2014/main" id="{759C03F4-435A-4C2E-BB52-D4B580AB2F95}"/>
+              </a:ext>
+            </a:extLst>
+          </p:cNvPr>
+          <p:cNvSpPr txBox="1"/>
+          <p:nvPr/>
+        </p:nvSpPr>
+        <p:spPr>
+          <a:xfrm>
+            <a:off x="6696075" y="3527818"/>
+            <a:ext cx="476250" cy="323850"/>
+          </a:xfrm>
+          <a:prstGeom prst="rect">
+            <a:avLst/>
+          </a:prstGeom>
+          <a:noFill/>
+          <a:ln>
+            <a:noFill/>
+          </a:ln>
+        </p:spPr>
+        <p:txBody>
+          <a:bodyPr spcFirstLastPara="1" wrap="square" lIns="0" tIns="0" rIns="0" bIns="0" anchor="t" anchorCtr="0">
+            <a:spAutoFit/>
+          </a:bodyPr>
+          <a:lstStyle/>
+          <a:p>
+            <a:pPr marL="0" marR="0" lvl="0" indent="0" algn="l" rtl="0">
+              <a:spcBef>
+                <a:spcPts val="0"/>
+              </a:spcBef>
+              <a:spcAft>
+                <a:spcPts val="0"/>
+              </a:spcAft>
+              <a:buNone/>
+            </a:pPr>
+            <a:r>
+              <a:rPr lang="en-US" sz="2100" b="1" i="0" u="none" strike="noStrike" cap="none">
+                <a:solidFill>
+                  <a:srgbClr val="3B82F6"/>
+                </a:solidFill>
+                <a:latin typeface="Inter"/>
+                <a:ea typeface="Inter"/>
+                <a:cs typeface="Inter"/>
+                <a:sym typeface="Inter"/>
+              </a:rPr>
+              <a:t>8</a:t>
+            </a:r>
+            <a:endParaRPr/>
+          </a:p>
+        </p:txBody>
+      </p:sp>
+      <p:sp>
+        <p:nvSpPr>
+          <p:cNvPr id="33" name="Google Shape;91;p13">
+            <a:extLst>
+              <a:ext uri="{FF2B5EF4-FFF2-40B4-BE49-F238E27FC236}">
+                <a16:creationId xmlns:a16="http://schemas.microsoft.com/office/drawing/2014/main" id="{B3C7B509-4A23-466E-98F3-E326983D47F8}"/>
+              </a:ext>
+            </a:extLst>
+          </p:cNvPr>
+          <p:cNvSpPr txBox="1"/>
+          <p:nvPr/>
+        </p:nvSpPr>
+        <p:spPr>
+          <a:xfrm>
+            <a:off x="790575" y="4451743"/>
+            <a:ext cx="476250" cy="323850"/>
+          </a:xfrm>
+          <a:prstGeom prst="rect">
+            <a:avLst/>
+          </a:prstGeom>
+          <a:noFill/>
+          <a:ln>
+            <a:noFill/>
+          </a:ln>
+        </p:spPr>
+        <p:txBody>
+          <a:bodyPr spcFirstLastPara="1" wrap="square" lIns="0" tIns="0" rIns="0" bIns="0" anchor="t" anchorCtr="0">
+            <a:spAutoFit/>
+          </a:bodyPr>
+          <a:lstStyle/>
+          <a:p>
+            <a:pPr marL="0" marR="0" lvl="0" indent="0" algn="l" rtl="0">
+              <a:spcBef>
+                <a:spcPts val="0"/>
+              </a:spcBef>
+              <a:spcAft>
+                <a:spcPts val="0"/>
+              </a:spcAft>
+              <a:buNone/>
+            </a:pPr>
+            <a:r>
+              <a:rPr lang="en-US" sz="2100" b="1" i="0" u="none" strike="noStrike" cap="none">
+                <a:solidFill>
+                  <a:srgbClr val="3B82F6"/>
+                </a:solidFill>
+                <a:latin typeface="Inter"/>
+                <a:ea typeface="Inter"/>
+                <a:cs typeface="Inter"/>
+                <a:sym typeface="Inter"/>
+              </a:rPr>
+              <a:t>4</a:t>
+            </a:r>
+            <a:endParaRPr/>
+          </a:p>
+        </p:txBody>
+      </p:sp>
+      <p:sp>
+        <p:nvSpPr>
+          <p:cNvPr id="34" name="Google Shape;92;p13">
+            <a:extLst>
+              <a:ext uri="{FF2B5EF4-FFF2-40B4-BE49-F238E27FC236}">
+                <a16:creationId xmlns:a16="http://schemas.microsoft.com/office/drawing/2014/main" id="{DB17EFBC-AEDD-4E92-AE8A-CBC609134993}"/>
+              </a:ext>
+            </a:extLst>
+          </p:cNvPr>
+          <p:cNvSpPr txBox="1"/>
+          <p:nvPr/>
+        </p:nvSpPr>
+        <p:spPr>
+          <a:xfrm>
+            <a:off x="6696075" y="4451743"/>
+            <a:ext cx="476250" cy="323850"/>
+          </a:xfrm>
+          <a:prstGeom prst="rect">
+            <a:avLst/>
+          </a:prstGeom>
+          <a:noFill/>
+          <a:ln>
+            <a:noFill/>
+          </a:ln>
+        </p:spPr>
+        <p:txBody>
+          <a:bodyPr spcFirstLastPara="1" wrap="square" lIns="0" tIns="0" rIns="0" bIns="0" anchor="t" anchorCtr="0">
+            <a:spAutoFit/>
+          </a:bodyPr>
+          <a:lstStyle/>
+          <a:p>
+            <a:pPr marL="0" marR="0" lvl="0" indent="0" algn="l" rtl="0">
+              <a:spcBef>
+                <a:spcPts val="0"/>
+              </a:spcBef>
+              <a:spcAft>
+                <a:spcPts val="0"/>
+              </a:spcAft>
+              <a:buNone/>
+            </a:pPr>
+            <a:r>
+              <a:rPr lang="en-US" sz="2100" b="1" i="0" u="none" strike="noStrike" cap="none">
+                <a:solidFill>
+                  <a:srgbClr val="3B82F6"/>
+                </a:solidFill>
+                <a:latin typeface="Inter"/>
+                <a:ea typeface="Inter"/>
+                <a:cs typeface="Inter"/>
+                <a:sym typeface="Inter"/>
+              </a:rPr>
+              <a:t>9</a:t>
+            </a:r>
+            <a:endParaRPr/>
+          </a:p>
+        </p:txBody>
+      </p:sp>
+      <p:sp>
+        <p:nvSpPr>
+          <p:cNvPr id="35" name="Google Shape;93;p13">
+            <a:extLst>
+              <a:ext uri="{FF2B5EF4-FFF2-40B4-BE49-F238E27FC236}">
+                <a16:creationId xmlns:a16="http://schemas.microsoft.com/office/drawing/2014/main" id="{3FC7143C-9BCD-415D-B34A-09F9C0DE0FBF}"/>
+              </a:ext>
+            </a:extLst>
+          </p:cNvPr>
+          <p:cNvSpPr txBox="1"/>
+          <p:nvPr/>
+        </p:nvSpPr>
+        <p:spPr>
+          <a:xfrm>
+            <a:off x="790575" y="5375668"/>
+            <a:ext cx="476250" cy="323850"/>
+          </a:xfrm>
+          <a:prstGeom prst="rect">
+            <a:avLst/>
+          </a:prstGeom>
+          <a:noFill/>
+          <a:ln>
+            <a:noFill/>
+          </a:ln>
+        </p:spPr>
+        <p:txBody>
+          <a:bodyPr spcFirstLastPara="1" wrap="square" lIns="0" tIns="0" rIns="0" bIns="0" anchor="t" anchorCtr="0">
+            <a:spAutoFit/>
+          </a:bodyPr>
+          <a:lstStyle/>
+          <a:p>
+            <a:pPr marL="0" marR="0" lvl="0" indent="0" algn="l" rtl="0">
+              <a:spcBef>
+                <a:spcPts val="0"/>
+              </a:spcBef>
+              <a:spcAft>
+                <a:spcPts val="0"/>
+              </a:spcAft>
+              <a:buNone/>
+            </a:pPr>
+            <a:r>
+              <a:rPr lang="en-US" sz="2100" b="1" i="0" u="none" strike="noStrike" cap="none">
+                <a:solidFill>
+                  <a:srgbClr val="3B82F6"/>
+                </a:solidFill>
+                <a:latin typeface="Inter"/>
+                <a:ea typeface="Inter"/>
+                <a:cs typeface="Inter"/>
+                <a:sym typeface="Inter"/>
+              </a:rPr>
+              <a:t>5</a:t>
+            </a:r>
+            <a:endParaRPr/>
+          </a:p>
+        </p:txBody>
+      </p:sp>
+      <p:sp>
+        <p:nvSpPr>
+          <p:cNvPr id="36" name="Google Shape;94;p13">
+            <a:extLst>
+              <a:ext uri="{FF2B5EF4-FFF2-40B4-BE49-F238E27FC236}">
+                <a16:creationId xmlns:a16="http://schemas.microsoft.com/office/drawing/2014/main" id="{BEFD8381-3734-4C9E-920C-CC8889D34D2D}"/>
+              </a:ext>
+            </a:extLst>
+          </p:cNvPr>
+          <p:cNvSpPr txBox="1"/>
+          <p:nvPr/>
+        </p:nvSpPr>
+        <p:spPr>
+          <a:xfrm>
+            <a:off x="6696075" y="5375668"/>
+            <a:ext cx="476250" cy="323850"/>
+          </a:xfrm>
+          <a:prstGeom prst="rect">
+            <a:avLst/>
+          </a:prstGeom>
+          <a:noFill/>
+          <a:ln>
+            <a:noFill/>
+          </a:ln>
+        </p:spPr>
+        <p:txBody>
+          <a:bodyPr spcFirstLastPara="1" wrap="square" lIns="0" tIns="0" rIns="0" bIns="0" anchor="t" anchorCtr="0">
+            <a:spAutoFit/>
+          </a:bodyPr>
+          <a:lstStyle/>
+          <a:p>
+            <a:pPr marL="0" marR="0" lvl="0" indent="0" algn="l" rtl="0">
+              <a:spcBef>
+                <a:spcPts val="0"/>
+              </a:spcBef>
+              <a:spcAft>
+                <a:spcPts val="0"/>
+              </a:spcAft>
+              <a:buNone/>
+            </a:pPr>
+            <a:r>
+              <a:rPr lang="en-US" sz="2100" b="1" i="0" u="none" strike="noStrike" cap="none">
+                <a:solidFill>
+                  <a:srgbClr val="3B82F6"/>
+                </a:solidFill>
+                <a:latin typeface="Inter"/>
+                <a:ea typeface="Inter"/>
+                <a:cs typeface="Inter"/>
+                <a:sym typeface="Inter"/>
+              </a:rPr>
+              <a:t>10</a:t>
+            </a:r>
+            <a:endParaRPr/>
+          </a:p>
+        </p:txBody>
+      </p:sp>
+      <p:pic>
+        <p:nvPicPr>
+          <p:cNvPr id="37" name="Google Shape;95;p13" descr="image.png">
+            <a:extLst>
+              <a:ext uri="{FF2B5EF4-FFF2-40B4-BE49-F238E27FC236}">
+                <a16:creationId xmlns:a16="http://schemas.microsoft.com/office/drawing/2014/main" id="{631CF160-0D56-42D4-B367-BD4A9C18A466}"/>
+              </a:ext>
+            </a:extLst>
+          </p:cNvPr>
+          <p:cNvPicPr preferRelativeResize="0"/>
+          <p:nvPr/>
+        </p:nvPicPr>
+        <p:blipFill rotWithShape="1">
+          <a:blip r:embed="rId3">
+            <a:alphaModFix/>
+          </a:blip>
+          <a:srcRect/>
+          <a:stretch/>
+        </p:blipFill>
+        <p:spPr>
+          <a:xfrm>
+            <a:off x="1266825" y="1742922"/>
+            <a:ext cx="823019" cy="344388"/>
+          </a:xfrm>
+          <a:prstGeom prst="rect">
+            <a:avLst/>
+          </a:prstGeom>
+          <a:noFill/>
+          <a:ln>
+            <a:noFill/>
+          </a:ln>
+        </p:spPr>
+      </p:pic>
+      <p:pic>
+        <p:nvPicPr>
+          <p:cNvPr id="38" name="Google Shape;96;p13" descr="image.png">
+            <a:extLst>
+              <a:ext uri="{FF2B5EF4-FFF2-40B4-BE49-F238E27FC236}">
+                <a16:creationId xmlns:a16="http://schemas.microsoft.com/office/drawing/2014/main" id="{DC216920-080C-4006-90BC-A559D84C619B}"/>
+              </a:ext>
+            </a:extLst>
+          </p:cNvPr>
+          <p:cNvPicPr preferRelativeResize="0"/>
+          <p:nvPr/>
+        </p:nvPicPr>
+        <p:blipFill rotWithShape="1">
+          <a:blip r:embed="rId4">
+            <a:alphaModFix/>
+          </a:blip>
+          <a:srcRect/>
+          <a:stretch/>
+        </p:blipFill>
+        <p:spPr>
+          <a:xfrm>
+            <a:off x="7172325" y="1748726"/>
+            <a:ext cx="819745" cy="332630"/>
+          </a:xfrm>
+          <a:prstGeom prst="rect">
+            <a:avLst/>
+          </a:prstGeom>
+          <a:noFill/>
+          <a:ln>
+            <a:noFill/>
+          </a:ln>
+        </p:spPr>
+      </p:pic>
+      <p:pic>
+        <p:nvPicPr>
+          <p:cNvPr id="39" name="Google Shape;97;p13" descr="image.png">
+            <a:extLst>
+              <a:ext uri="{FF2B5EF4-FFF2-40B4-BE49-F238E27FC236}">
+                <a16:creationId xmlns:a16="http://schemas.microsoft.com/office/drawing/2014/main" id="{F4067AB0-2471-4D5E-A29C-4190831C1A3A}"/>
+              </a:ext>
+            </a:extLst>
+          </p:cNvPr>
+          <p:cNvPicPr preferRelativeResize="0"/>
+          <p:nvPr/>
+        </p:nvPicPr>
+        <p:blipFill rotWithShape="1">
+          <a:blip r:embed="rId5">
+            <a:alphaModFix/>
+          </a:blip>
+          <a:srcRect/>
+          <a:stretch/>
+        </p:blipFill>
+        <p:spPr>
+          <a:xfrm>
+            <a:off x="1266825" y="2630235"/>
+            <a:ext cx="823019" cy="344388"/>
+          </a:xfrm>
+          <a:prstGeom prst="rect">
+            <a:avLst/>
+          </a:prstGeom>
+          <a:noFill/>
+          <a:ln>
+            <a:noFill/>
+          </a:ln>
+        </p:spPr>
+      </p:pic>
+      <p:pic>
+        <p:nvPicPr>
+          <p:cNvPr id="40" name="Google Shape;98;p13" descr="image.png">
+            <a:extLst>
+              <a:ext uri="{FF2B5EF4-FFF2-40B4-BE49-F238E27FC236}">
+                <a16:creationId xmlns:a16="http://schemas.microsoft.com/office/drawing/2014/main" id="{516A4329-E4B7-497D-9704-974DD5A68A5C}"/>
+              </a:ext>
+            </a:extLst>
+          </p:cNvPr>
+          <p:cNvPicPr preferRelativeResize="0"/>
+          <p:nvPr/>
+        </p:nvPicPr>
+        <p:blipFill rotWithShape="1">
+          <a:blip r:embed="rId6">
+            <a:alphaModFix/>
+          </a:blip>
+          <a:srcRect/>
+          <a:stretch/>
+        </p:blipFill>
+        <p:spPr>
+          <a:xfrm>
+            <a:off x="7172325" y="2636039"/>
+            <a:ext cx="1008161" cy="332630"/>
+          </a:xfrm>
+          <a:prstGeom prst="rect">
+            <a:avLst/>
+          </a:prstGeom>
+          <a:noFill/>
+          <a:ln>
+            <a:noFill/>
+          </a:ln>
+        </p:spPr>
+      </p:pic>
+      <p:pic>
+        <p:nvPicPr>
+          <p:cNvPr id="41" name="Google Shape;99;p13" descr="image.png">
+            <a:extLst>
+              <a:ext uri="{FF2B5EF4-FFF2-40B4-BE49-F238E27FC236}">
+                <a16:creationId xmlns:a16="http://schemas.microsoft.com/office/drawing/2014/main" id="{FE3567BF-123A-456C-877E-586E1C1E190A}"/>
+              </a:ext>
+            </a:extLst>
+          </p:cNvPr>
+          <p:cNvPicPr preferRelativeResize="0"/>
+          <p:nvPr/>
+        </p:nvPicPr>
+        <p:blipFill rotWithShape="1">
+          <a:blip r:embed="rId7">
+            <a:alphaModFix/>
+          </a:blip>
+          <a:srcRect/>
+          <a:stretch/>
+        </p:blipFill>
+        <p:spPr>
+          <a:xfrm>
+            <a:off x="1266825" y="3517548"/>
+            <a:ext cx="823019" cy="344388"/>
+          </a:xfrm>
+          <a:prstGeom prst="rect">
+            <a:avLst/>
+          </a:prstGeom>
+          <a:noFill/>
+          <a:ln>
+            <a:noFill/>
+          </a:ln>
+        </p:spPr>
+      </p:pic>
+      <p:pic>
+        <p:nvPicPr>
+          <p:cNvPr id="42" name="Google Shape;100;p13" descr="image.png">
+            <a:extLst>
+              <a:ext uri="{FF2B5EF4-FFF2-40B4-BE49-F238E27FC236}">
+                <a16:creationId xmlns:a16="http://schemas.microsoft.com/office/drawing/2014/main" id="{2ED3206F-2CBA-4477-A0C3-A41304E9D376}"/>
+              </a:ext>
+            </a:extLst>
+          </p:cNvPr>
+          <p:cNvPicPr preferRelativeResize="0"/>
+          <p:nvPr/>
+        </p:nvPicPr>
+        <p:blipFill rotWithShape="1">
+          <a:blip r:embed="rId8">
+            <a:alphaModFix/>
+          </a:blip>
+          <a:srcRect/>
+          <a:stretch/>
+        </p:blipFill>
+        <p:spPr>
+          <a:xfrm>
+            <a:off x="7172325" y="3523353"/>
+            <a:ext cx="1196726" cy="332630"/>
+          </a:xfrm>
+          <a:prstGeom prst="rect">
+            <a:avLst/>
+          </a:prstGeom>
+          <a:noFill/>
+          <a:ln>
+            <a:noFill/>
+          </a:ln>
+        </p:spPr>
+      </p:pic>
+      <p:pic>
+        <p:nvPicPr>
+          <p:cNvPr id="43" name="Google Shape;101;p13" descr="image.png">
+            <a:extLst>
+              <a:ext uri="{FF2B5EF4-FFF2-40B4-BE49-F238E27FC236}">
+                <a16:creationId xmlns:a16="http://schemas.microsoft.com/office/drawing/2014/main" id="{762774AD-4587-4133-90E3-37BC6245777D}"/>
+              </a:ext>
+            </a:extLst>
+          </p:cNvPr>
+          <p:cNvPicPr preferRelativeResize="0"/>
+          <p:nvPr/>
+        </p:nvPicPr>
+        <p:blipFill rotWithShape="1">
+          <a:blip r:embed="rId9">
+            <a:alphaModFix/>
+          </a:blip>
+          <a:srcRect/>
+          <a:stretch/>
+        </p:blipFill>
+        <p:spPr>
+          <a:xfrm>
+            <a:off x="1266825" y="4441473"/>
+            <a:ext cx="1011435" cy="344388"/>
+          </a:xfrm>
+          <a:prstGeom prst="rect">
+            <a:avLst/>
+          </a:prstGeom>
+          <a:noFill/>
+          <a:ln>
+            <a:noFill/>
+          </a:ln>
+        </p:spPr>
+      </p:pic>
+      <p:pic>
+        <p:nvPicPr>
+          <p:cNvPr id="44" name="Google Shape;102;p13" descr="image.png">
+            <a:extLst>
+              <a:ext uri="{FF2B5EF4-FFF2-40B4-BE49-F238E27FC236}">
+                <a16:creationId xmlns:a16="http://schemas.microsoft.com/office/drawing/2014/main" id="{4FFD4EDC-B886-405E-8A38-0C8CBDDFD77F}"/>
+              </a:ext>
+            </a:extLst>
+          </p:cNvPr>
+          <p:cNvPicPr preferRelativeResize="0"/>
+          <p:nvPr/>
+        </p:nvPicPr>
+        <p:blipFill rotWithShape="1">
+          <a:blip r:embed="rId10">
+            <a:alphaModFix/>
+          </a:blip>
+          <a:srcRect/>
+          <a:stretch/>
+        </p:blipFill>
+        <p:spPr>
+          <a:xfrm>
+            <a:off x="7172325" y="4404862"/>
+            <a:ext cx="1029890" cy="417611"/>
+          </a:xfrm>
+          <a:prstGeom prst="rect">
+            <a:avLst/>
+          </a:prstGeom>
+          <a:noFill/>
+          <a:ln>
+            <a:noFill/>
+          </a:ln>
+        </p:spPr>
+      </p:pic>
+      <p:pic>
+        <p:nvPicPr>
+          <p:cNvPr id="45" name="Google Shape;103;p13" descr="image.png">
+            <a:extLst>
+              <a:ext uri="{FF2B5EF4-FFF2-40B4-BE49-F238E27FC236}">
+                <a16:creationId xmlns:a16="http://schemas.microsoft.com/office/drawing/2014/main" id="{F89D53CE-A59D-41DC-A2E9-3863253DDF7B}"/>
+              </a:ext>
+            </a:extLst>
+          </p:cNvPr>
+          <p:cNvPicPr preferRelativeResize="0"/>
+          <p:nvPr/>
+        </p:nvPicPr>
+        <p:blipFill rotWithShape="1">
+          <a:blip r:embed="rId11">
+            <a:alphaModFix/>
+          </a:blip>
+          <a:srcRect/>
+          <a:stretch/>
+        </p:blipFill>
+        <p:spPr>
+          <a:xfrm>
+            <a:off x="1266825" y="5365398"/>
+            <a:ext cx="823019" cy="344388"/>
+          </a:xfrm>
+          <a:prstGeom prst="rect">
+            <a:avLst/>
+          </a:prstGeom>
+          <a:noFill/>
+          <a:ln>
+            <a:noFill/>
+          </a:ln>
+        </p:spPr>
+      </p:pic>
+      <p:pic>
+        <p:nvPicPr>
+          <p:cNvPr id="46" name="Google Shape;104;p13" descr="image.png">
+            <a:extLst>
+              <a:ext uri="{FF2B5EF4-FFF2-40B4-BE49-F238E27FC236}">
+                <a16:creationId xmlns:a16="http://schemas.microsoft.com/office/drawing/2014/main" id="{969454F6-88DE-45AF-9357-BB89A4B7E662}"/>
+              </a:ext>
+            </a:extLst>
+          </p:cNvPr>
+          <p:cNvPicPr preferRelativeResize="0"/>
+          <p:nvPr/>
+        </p:nvPicPr>
+        <p:blipFill rotWithShape="1">
+          <a:blip r:embed="rId12">
+            <a:alphaModFix/>
+          </a:blip>
+          <a:srcRect/>
+          <a:stretch/>
+        </p:blipFill>
+        <p:spPr>
+          <a:xfrm>
+            <a:off x="7172325" y="5371203"/>
+            <a:ext cx="1639490" cy="332630"/>
+          </a:xfrm>
+          <a:prstGeom prst="rect">
+            <a:avLst/>
+          </a:prstGeom>
+          <a:noFill/>
+          <a:ln>
+            <a:noFill/>
+          </a:ln>
+        </p:spPr>
+      </p:pic>
     </p:spTree>
     <p:extLst>
       <p:ext uri="{BB962C8B-B14F-4D97-AF65-F5344CB8AC3E}">
@@ -20559,7 +21456,7 @@
         </p:nvSpPr>
         <p:spPr>
           <a:xfrm>
-            <a:off x="571500" y="571500"/>
+            <a:off x="444179" y="204130"/>
             <a:ext cx="95250" cy="685800"/>
           </a:xfrm>
           <a:prstGeom prst="rect">
@@ -20613,7 +21510,7 @@
         </p:nvSpPr>
         <p:spPr>
           <a:xfrm>
-            <a:off x="762000" y="571500"/>
+            <a:off x="790575" y="270031"/>
             <a:ext cx="11401425" cy="553998"/>
           </a:xfrm>
           <a:prstGeom prst="rect">
@@ -20655,6 +21552,36 @@
           </a:p>
         </p:txBody>
       </p:sp>
+      <p:pic>
+        <p:nvPicPr>
+          <p:cNvPr id="3" name="図 2">
+            <a:extLst>
+              <a:ext uri="{FF2B5EF4-FFF2-40B4-BE49-F238E27FC236}">
+                <a16:creationId xmlns:a16="http://schemas.microsoft.com/office/drawing/2014/main" id="{7130ECBC-120B-4AD7-9135-7431607BAFAF}"/>
+              </a:ext>
+            </a:extLst>
+          </p:cNvPr>
+          <p:cNvPicPr>
+            <a:picLocks noChangeAspect="1"/>
+          </p:cNvPicPr>
+          <p:nvPr/>
+        </p:nvPicPr>
+        <p:blipFill>
+          <a:blip r:embed="rId2"/>
+          <a:stretch>
+            <a:fillRect/>
+          </a:stretch>
+        </p:blipFill>
+        <p:spPr>
+          <a:xfrm>
+            <a:off x="1113180" y="889930"/>
+            <a:ext cx="9965640" cy="5968070"/>
+          </a:xfrm>
+          <a:prstGeom prst="rect">
+            <a:avLst/>
+          </a:prstGeom>
+        </p:spPr>
+      </p:pic>
     </p:spTree>
     <p:extLst>
       <p:ext uri="{BB962C8B-B14F-4D97-AF65-F5344CB8AC3E}">
@@ -24264,8 +25191,8 @@
           </a:p>
         </p:txBody>
       </p:sp>
-      <mc:AlternateContent xmlns:mc="http://schemas.openxmlformats.org/markup-compatibility/2006">
-        <mc:Choice xmlns:a14="http://schemas.microsoft.com/office/drawing/2010/main" Requires="a14">
+      <mc:AlternateContent xmlns:mc="http://schemas.openxmlformats.org/markup-compatibility/2006" xmlns:a14="http://schemas.microsoft.com/office/drawing/2010/main">
+        <mc:Choice Requires="a14">
           <p:sp>
             <p:nvSpPr>
               <p:cNvPr id="19" name="テキスト ボックス 18">
@@ -24294,7 +25221,6 @@
               </a:bodyPr>
               <a:lstStyle/>
               <a:p>
-                <a:pPr/>
                 <a14:m>
                   <m:oMath xmlns:m="http://schemas.openxmlformats.org/officeDocument/2006/math">
                     <m:f>
@@ -24340,7 +25266,7 @@
                     <m:f>
                       <m:fPr>
                         <m:ctrlPr>
-                          <a:rPr lang="ja-JP" altLang="en-US" sz="4000" dirty="0" smtClean="0">
+                          <a:rPr lang="ja-JP" altLang="en-US" sz="4000" i="1" dirty="0" smtClean="0">
                             <a:solidFill>
                               <a:srgbClr val="836967"/>
                             </a:solidFill>
@@ -24380,7 +25306,7 @@
                     <m:f>
                       <m:fPr>
                         <m:ctrlPr>
-                          <a:rPr lang="ja-JP" altLang="en-US" sz="4000" dirty="0" smtClean="0">
+                          <a:rPr lang="ja-JP" altLang="en-US" sz="4000" i="1" dirty="0" smtClean="0">
                             <a:solidFill>
                               <a:srgbClr val="836967"/>
                             </a:solidFill>
@@ -24412,7 +25338,7 @@
             </p:txBody>
           </p:sp>
         </mc:Choice>
-        <mc:Fallback>
+        <mc:Fallback xmlns="">
           <p:sp>
             <p:nvSpPr>
               <p:cNvPr id="19" name="テキスト ボックス 18">
@@ -24457,8 +25383,8 @@
           </p:sp>
         </mc:Fallback>
       </mc:AlternateContent>
-      <mc:AlternateContent xmlns:mc="http://schemas.openxmlformats.org/markup-compatibility/2006">
-        <mc:Choice xmlns:a14="http://schemas.microsoft.com/office/drawing/2010/main" Requires="a14">
+      <mc:AlternateContent xmlns:mc="http://schemas.openxmlformats.org/markup-compatibility/2006" xmlns:a14="http://schemas.microsoft.com/office/drawing/2010/main">
+        <mc:Choice Requires="a14">
           <p:sp>
             <p:nvSpPr>
               <p:cNvPr id="20" name="テキスト ボックス 19">
@@ -24487,7 +25413,6 @@
               </a:bodyPr>
               <a:lstStyle/>
               <a:p>
-                <a:pPr/>
                 <a14:m>
                   <m:oMath xmlns:m="http://schemas.openxmlformats.org/officeDocument/2006/math">
                     <m:f>
@@ -24530,7 +25455,7 @@
                     <m:f>
                       <m:fPr>
                         <m:ctrlPr>
-                          <a:rPr lang="ja-JP" altLang="en-US" sz="4000" dirty="0" smtClean="0">
+                          <a:rPr lang="ja-JP" altLang="en-US" sz="4000" i="1" dirty="0" smtClean="0">
                             <a:solidFill>
                               <a:srgbClr val="836967"/>
                             </a:solidFill>
@@ -24703,7 +25628,7 @@
             </p:txBody>
           </p:sp>
         </mc:Choice>
-        <mc:Fallback>
+        <mc:Fallback xmlns="">
           <p:sp>
             <p:nvSpPr>
               <p:cNvPr id="20" name="テキスト ボックス 19">
@@ -25430,8 +26355,8 @@
           </a:p>
         </p:txBody>
       </p:sp>
-      <mc:AlternateContent xmlns:mc="http://schemas.openxmlformats.org/markup-compatibility/2006">
-        <mc:Choice xmlns:a14="http://schemas.microsoft.com/office/drawing/2010/main" Requires="a14">
+      <mc:AlternateContent xmlns:mc="http://schemas.openxmlformats.org/markup-compatibility/2006" xmlns:a14="http://schemas.microsoft.com/office/drawing/2010/main">
+        <mc:Choice Requires="a14">
           <p:sp>
             <p:nvSpPr>
               <p:cNvPr id="34" name="テキスト ボックス 33">
@@ -25504,7 +26429,7 @@
                       <m:f>
                         <m:fPr>
                           <m:ctrlPr>
-                            <a:rPr lang="ja-JP" altLang="en-US" sz="2800" dirty="0" smtClean="0">
+                            <a:rPr lang="ja-JP" altLang="en-US" sz="2800" i="1" dirty="0" smtClean="0">
                               <a:solidFill>
                                 <a:srgbClr val="836967"/>
                               </a:solidFill>
@@ -25537,7 +26462,7 @@
             </p:txBody>
           </p:sp>
         </mc:Choice>
-        <mc:Fallback>
+        <mc:Fallback xmlns="">
           <p:sp>
             <p:nvSpPr>
               <p:cNvPr id="34" name="テキスト ボックス 33">

--- a/01.数学基礎/01.数学基礎.pptx
+++ b/01.数学基礎/01.数学基礎.pptx
@@ -37,36 +37,29 @@
   <p:notesSz cx="6858000" cy="9144000"/>
   <p:embeddedFontLst>
     <p:embeddedFont>
-      <p:font typeface="Calibri" panose="020F0502020204030204" pitchFamily="34" charset="0"/>
+      <p:font typeface="Cambria Math" panose="02040503050406030204" pitchFamily="18" charset="0"/>
       <p:regular r:id="rId27"/>
-      <p:bold r:id="rId28"/>
-      <p:italic r:id="rId29"/>
-      <p:boldItalic r:id="rId30"/>
-    </p:embeddedFont>
-    <p:embeddedFont>
-      <p:font typeface="Cambria Math" panose="02040503050406030204" pitchFamily="18" charset="0"/>
-      <p:regular r:id="rId31"/>
     </p:embeddedFont>
     <p:embeddedFont>
       <p:font typeface="Inter" panose="020B0600070205080204" charset="0"/>
+      <p:regular r:id="rId28"/>
+      <p:bold r:id="rId29"/>
+      <p:italic r:id="rId30"/>
+      <p:boldItalic r:id="rId31"/>
+    </p:embeddedFont>
+    <p:embeddedFont>
+      <p:font typeface="Inter SemiBold" panose="020B0600070205080204" charset="0"/>
       <p:regular r:id="rId32"/>
       <p:bold r:id="rId33"/>
       <p:italic r:id="rId34"/>
       <p:boldItalic r:id="rId35"/>
     </p:embeddedFont>
     <p:embeddedFont>
-      <p:font typeface="Inter SemiBold" panose="020B0600070205080204" charset="0"/>
+      <p:font typeface="Poppins" panose="00000500000000000000" pitchFamily="2" charset="0"/>
       <p:regular r:id="rId36"/>
       <p:bold r:id="rId37"/>
       <p:italic r:id="rId38"/>
       <p:boldItalic r:id="rId39"/>
-    </p:embeddedFont>
-    <p:embeddedFont>
-      <p:font typeface="Poppins" panose="00000500000000000000" pitchFamily="2" charset="0"/>
-      <p:regular r:id="rId40"/>
-      <p:bold r:id="rId41"/>
-      <p:italic r:id="rId42"/>
-      <p:boldItalic r:id="rId43"/>
     </p:embeddedFont>
   </p:embeddedFontLst>
   <p:defaultTextStyle>
@@ -1083,6 +1076,13 @@
             </a:pathLst>
           </a:custGeom>
         </p:spPr>
+        <p:txBody>
+          <a:bodyPr/>
+          <a:lstStyle/>
+          <a:p>
+            <a:endParaRPr lang="ja-JP" altLang="en-US"/>
+          </a:p>
+        </p:txBody>
       </p:sp>
     </p:spTree>
   </p:cSld>
@@ -1520,6 +1520,13 @@
             </a:pathLst>
           </a:custGeom>
         </p:spPr>
+        <p:txBody>
+          <a:bodyPr/>
+          <a:lstStyle/>
+          <a:p>
+            <a:endParaRPr lang="ja-JP" altLang="en-US"/>
+          </a:p>
+        </p:txBody>
       </p:sp>
     </p:spTree>
     <p:extLst>
@@ -1874,6 +1881,13 @@
             </a:pathLst>
           </a:custGeom>
         </p:spPr>
+        <p:txBody>
+          <a:bodyPr/>
+          <a:lstStyle/>
+          <a:p>
+            <a:endParaRPr lang="ja-JP" altLang="en-US"/>
+          </a:p>
+        </p:txBody>
       </p:sp>
     </p:spTree>
     <p:extLst>
@@ -3342,6 +3356,13 @@
             </a:pathLst>
           </a:custGeom>
         </p:spPr>
+        <p:txBody>
+          <a:bodyPr/>
+          <a:lstStyle/>
+          <a:p>
+            <a:endParaRPr lang="ja-JP" altLang="en-US"/>
+          </a:p>
+        </p:txBody>
       </p:sp>
     </p:spTree>
   </p:cSld>
@@ -3446,6 +3467,13 @@
             </a:pathLst>
           </a:custGeom>
         </p:spPr>
+        <p:txBody>
+          <a:bodyPr/>
+          <a:lstStyle/>
+          <a:p>
+            <a:endParaRPr lang="ja-JP" altLang="en-US"/>
+          </a:p>
+        </p:txBody>
       </p:sp>
     </p:spTree>
   </p:cSld>
@@ -3550,6 +3578,13 @@
             </a:pathLst>
           </a:custGeom>
         </p:spPr>
+        <p:txBody>
+          <a:bodyPr/>
+          <a:lstStyle/>
+          <a:p>
+            <a:endParaRPr lang="ja-JP" altLang="en-US"/>
+          </a:p>
+        </p:txBody>
       </p:sp>
     </p:spTree>
   </p:cSld>
@@ -18659,7 +18694,7 @@
               <a:t>乗数</a:t>
             </a:r>
             <a:r>
-              <a:rPr lang="en-US" sz="3600" b="1" i="0" u="none" strike="noStrike" cap="none" dirty="0" err="1">
+              <a:rPr lang="en-US" sz="3600" b="1" i="0" u="none" strike="noStrike" cap="none" dirty="0">
                 <a:solidFill>
                   <a:srgbClr val="0F172A"/>
                 </a:solidFill>
